--- a/提出物/操作説明書/stundet_FLYFROG～蛙の大冒険～_操作説明書.pptx
+++ b/提出物/操作説明書/stundet_FLYFROG～蛙の大冒険～_操作説明書.pptx
@@ -4020,7 +4020,7 @@
         </p:nvSpPr>
         <p:spPr>
           <a:xfrm>
-            <a:off x="4156666" y="735077"/>
+            <a:off x="4064215" y="250683"/>
             <a:ext cx="3878668" cy="1015663"/>
           </a:xfrm>
           <a:prstGeom prst="rect">
@@ -4077,8 +4077,8 @@
         </p:blipFill>
         <p:spPr>
           <a:xfrm>
-            <a:off x="6483051" y="4701349"/>
-            <a:ext cx="4434189" cy="1990092"/>
+            <a:off x="8221620" y="1869331"/>
+            <a:ext cx="3732487" cy="1675164"/>
           </a:xfrm>
           <a:prstGeom prst="rect">
             <a:avLst/>
@@ -4113,8 +4113,8 @@
         </p:blipFill>
         <p:spPr>
           <a:xfrm>
-            <a:off x="6483053" y="2022301"/>
-            <a:ext cx="4434189" cy="2032972"/>
+            <a:off x="3700800" y="1775643"/>
+            <a:ext cx="4062457" cy="1862541"/>
           </a:xfrm>
           <a:prstGeom prst="rect">
             <a:avLst/>
@@ -4149,8 +4149,8 @@
         </p:blipFill>
         <p:spPr>
           <a:xfrm>
-            <a:off x="1252458" y="4701349"/>
-            <a:ext cx="4434189" cy="1990093"/>
+            <a:off x="419012" y="4033291"/>
+            <a:ext cx="5491678" cy="2464701"/>
           </a:xfrm>
           <a:prstGeom prst="rect">
             <a:avLst/>
@@ -4185,8 +4185,8 @@
         </p:blipFill>
         <p:spPr>
           <a:xfrm>
-            <a:off x="1252458" y="2022301"/>
-            <a:ext cx="4434189" cy="2032972"/>
+            <a:off x="-310954" y="1643725"/>
+            <a:ext cx="3912071" cy="1793593"/>
           </a:xfrm>
           <a:prstGeom prst="rect">
             <a:avLst/>
@@ -4221,8 +4221,44 @@
         </p:blipFill>
         <p:spPr>
           <a:xfrm>
-            <a:off x="313339" y="216687"/>
-            <a:ext cx="3843327" cy="1669833"/>
+            <a:off x="123769" y="0"/>
+            <a:ext cx="3210446" cy="1394861"/>
+          </a:xfrm>
+          <a:prstGeom prst="rect">
+            <a:avLst/>
+          </a:prstGeom>
+        </p:spPr>
+      </p:pic>
+      <p:pic>
+        <p:nvPicPr>
+          <p:cNvPr id="3" name="図 2">
+            <a:extLst>
+              <a:ext uri="{FF2B5EF4-FFF2-40B4-BE49-F238E27FC236}">
+                <a16:creationId xmlns:a16="http://schemas.microsoft.com/office/drawing/2014/main" id="{E43074F8-0A21-36B4-3E5B-760E9C7D2899}"/>
+              </a:ext>
+            </a:extLst>
+          </p:cNvPr>
+          <p:cNvPicPr>
+            <a:picLocks noChangeAspect="1"/>
+          </p:cNvPicPr>
+          <p:nvPr/>
+        </p:nvPicPr>
+        <p:blipFill>
+          <a:blip r:embed="rId7">
+            <a:extLst>
+              <a:ext uri="{28A0092B-C50C-407E-A947-70E740481C1C}">
+                <a14:useLocalDpi xmlns:a14="http://schemas.microsoft.com/office/drawing/2010/main" val="0"/>
+              </a:ext>
+            </a:extLst>
+          </a:blip>
+          <a:stretch>
+            <a:fillRect/>
+          </a:stretch>
+        </p:blipFill>
+        <p:spPr>
+          <a:xfrm>
+            <a:off x="6281311" y="4033291"/>
+            <a:ext cx="5091845" cy="2334492"/>
           </a:xfrm>
           <a:prstGeom prst="rect">
             <a:avLst/>
@@ -4873,20 +4909,20 @@
 </file>
 
 <file path=customXml/item1.xml><?xml version="1.0" encoding="utf-8"?>
-<p:properties xmlns:p="http://schemas.microsoft.com/office/2006/metadata/properties" xmlns:xsi="http://www.w3.org/2001/XMLSchema-instance" xmlns:pc="http://schemas.microsoft.com/office/infopath/2007/PartnerControls">
-  <documentManagement>
-    <_activity xmlns="f9bed73b-e658-49b5-bba4-544b5c108067" xsi:nil="true"/>
-  </documentManagement>
-</p:properties>
-</file>
-
-<file path=customXml/item2.xml><?xml version="1.0" encoding="utf-8"?>
 <?mso-contentType ?>
 <FormTemplates xmlns="http://schemas.microsoft.com/sharepoint/v3/contenttype/forms">
   <Display>DocumentLibraryForm</Display>
   <Edit>DocumentLibraryForm</Edit>
   <New>DocumentLibraryForm</New>
 </FormTemplates>
+</file>
+
+<file path=customXml/item2.xml><?xml version="1.0" encoding="utf-8"?>
+<p:properties xmlns:p="http://schemas.microsoft.com/office/2006/metadata/properties" xmlns:xsi="http://www.w3.org/2001/XMLSchema-instance" xmlns:pc="http://schemas.microsoft.com/office/infopath/2007/PartnerControls">
+  <documentManagement>
+    <_activity xmlns="f9bed73b-e658-49b5-bba4-544b5c108067" xsi:nil="true"/>
+  </documentManagement>
+</p:properties>
 </file>
 
 <file path=customXml/item3.xml><?xml version="1.0" encoding="utf-8"?>
@@ -5085,6 +5121,14 @@
 </file>
 
 <file path=customXml/itemProps1.xml><?xml version="1.0" encoding="utf-8"?>
+<ds:datastoreItem xmlns:ds="http://schemas.openxmlformats.org/officeDocument/2006/customXml" ds:itemID="{17E40DE0-AA04-445D-83A0-48331E84043A}">
+  <ds:schemaRefs>
+    <ds:schemaRef ds:uri="http://schemas.microsoft.com/sharepoint/v3/contenttype/forms"/>
+  </ds:schemaRefs>
+</ds:datastoreItem>
+</file>
+
+<file path=customXml/itemProps2.xml><?xml version="1.0" encoding="utf-8"?>
 <ds:datastoreItem xmlns:ds="http://schemas.openxmlformats.org/officeDocument/2006/customXml" ds:itemID="{36B4CB0B-56BB-4B85-8F94-C2F40EAF6989}">
   <ds:schemaRefs>
     <ds:schemaRef ds:uri="http://schemas.microsoft.com/office/2006/metadata/properties"/>
@@ -5097,14 +5141,6 @@
     <ds:schemaRef ds:uri="http://purl.org/dc/dcmitype/"/>
     <ds:schemaRef ds:uri="http://schemas.openxmlformats.org/package/2006/metadata/core-properties"/>
     <ds:schemaRef ds:uri="727260ab-068d-42bd-9930-0b757632fedd"/>
-  </ds:schemaRefs>
-</ds:datastoreItem>
-</file>
-
-<file path=customXml/itemProps2.xml><?xml version="1.0" encoding="utf-8"?>
-<ds:datastoreItem xmlns:ds="http://schemas.openxmlformats.org/officeDocument/2006/customXml" ds:itemID="{17E40DE0-AA04-445D-83A0-48331E84043A}">
-  <ds:schemaRefs>
-    <ds:schemaRef ds:uri="http://schemas.microsoft.com/sharepoint/v3/contenttype/forms"/>
   </ds:schemaRefs>
 </ds:datastoreItem>
 </file>
